--- a/диплом/ДИПЛОМ/Презентация_090304_21И1596_ИКБО-30-21_ПарусовПА.pptx
+++ b/диплом/ДИПЛОМ/Презентация_090304_21И1596_ИКБО-30-21_ПарусовПА.pptx
@@ -2195,7 +2195,7 @@
             </a:pPr>
             <a:fld id="{1D8BD707-D9CF-40AE-B4C6-C98DA3205C09}" type="datetimeFigureOut">
               <a:rPr lang="en-US"/>
-              <a:t>5/18/2025</a:t>
+              <a:t>5/30/2025</a:t>
             </a:fld>
             <a:endParaRPr lang="en-US"/>
           </a:p>
@@ -2391,7 +2391,7 @@
             </a:pPr>
             <a:fld id="{1D8BD707-D9CF-40AE-B4C6-C98DA3205C09}" type="datetimeFigureOut">
               <a:rPr lang="en-US"/>
-              <a:t>5/18/2025</a:t>
+              <a:t>5/30/2025</a:t>
             </a:fld>
             <a:endParaRPr lang="en-US"/>
           </a:p>
@@ -2627,7 +2627,7 @@
             </a:pPr>
             <a:fld id="{1D8BD707-D9CF-40AE-B4C6-C98DA3205C09}" type="datetimeFigureOut">
               <a:rPr lang="en-US"/>
-              <a:t>5/18/2025</a:t>
+              <a:t>5/30/2025</a:t>
             </a:fld>
             <a:endParaRPr lang="en-US"/>
           </a:p>
@@ -2799,7 +2799,7 @@
             </a:pPr>
             <a:fld id="{1D8BD707-D9CF-40AE-B4C6-C98DA3205C09}" type="datetimeFigureOut">
               <a:rPr lang="en-US"/>
-              <a:t>5/18/2025</a:t>
+              <a:t>5/30/2025</a:t>
             </a:fld>
             <a:endParaRPr lang="en-US"/>
           </a:p>
@@ -2939,7 +2939,7 @@
             </a:pPr>
             <a:fld id="{1D8BD707-D9CF-40AE-B4C6-C98DA3205C09}" type="datetimeFigureOut">
               <a:rPr lang="en-US"/>
-              <a:t>5/18/2025</a:t>
+              <a:t>5/30/2025</a:t>
             </a:fld>
             <a:endParaRPr lang="en-US"/>
           </a:p>
@@ -3203,7 +3203,7 @@
             </a:pPr>
             <a:fld id="{1D8BD707-D9CF-40AE-B4C6-C98DA3205C09}" type="datetimeFigureOut">
               <a:rPr lang="en-US"/>
-              <a:t>5/18/2025</a:t>
+              <a:t>5/30/2025</a:t>
             </a:fld>
             <a:endParaRPr lang="en-US"/>
           </a:p>
@@ -5085,9 +5085,132 @@
           </a:p>
         </p:txBody>
       </p:sp>
+      <p:sp>
+        <p:nvSpPr>
+          <p:cNvPr id="6" name="TextBox 11"/>
+          <p:cNvSpPr txBox="1"/>
+          <p:nvPr/>
+        </p:nvSpPr>
+        <p:spPr bwMode="auto">
+          <a:xfrm>
+            <a:off x="7762720" y="4724400"/>
+            <a:ext cx="3895880" cy="646331"/>
+          </a:xfrm>
+          <a:prstGeom prst="rect">
+            <a:avLst/>
+          </a:prstGeom>
+          <a:noFill/>
+        </p:spPr>
+        <p:txBody>
+          <a:bodyPr wrap="square" rtlCol="0">
+            <a:spAutoFit/>
+          </a:bodyPr>
+          <a:lstStyle/>
+          <a:p>
+            <a:pPr>
+              <a:defRPr/>
+            </a:pPr>
+            <a:r>
+              <a:rPr lang="ru-RU" dirty="0">
+                <a:latin typeface="Times New Roman"/>
+                <a:cs typeface="Times New Roman"/>
+              </a:rPr>
+              <a:t>Рисунок </a:t>
+            </a:r>
+            <a:r>
+              <a:rPr lang="ru-RU" dirty="0" smtClean="0">
+                <a:latin typeface="Times New Roman"/>
+                <a:cs typeface="Times New Roman"/>
+              </a:rPr>
+              <a:t>15 </a:t>
+            </a:r>
+            <a:r>
+              <a:rPr lang="ru-RU" dirty="0">
+                <a:latin typeface="Times New Roman"/>
+                <a:cs typeface="Times New Roman"/>
+              </a:rPr>
+              <a:t>– С</a:t>
+            </a:r>
+            <a:r>
+              <a:rPr lang="ru-RU" dirty="0" smtClean="0">
+                <a:latin typeface="Times New Roman"/>
+                <a:cs typeface="Times New Roman"/>
+              </a:rPr>
+              <a:t>траница управления задачами</a:t>
+            </a:r>
+            <a:endParaRPr lang="ru-RU" dirty="0">
+              <a:latin typeface="Times New Roman"/>
+              <a:cs typeface="Times New Roman"/>
+            </a:endParaRPr>
+          </a:p>
+        </p:txBody>
+      </p:sp>
+      <p:sp>
+        <p:nvSpPr>
+          <p:cNvPr id="10" name="TextBox 11"/>
+          <p:cNvSpPr txBox="1"/>
+          <p:nvPr/>
+        </p:nvSpPr>
+        <p:spPr bwMode="auto">
+          <a:xfrm>
+            <a:off x="6400800" y="3488532"/>
+            <a:ext cx="5534732" cy="369332"/>
+          </a:xfrm>
+          <a:prstGeom prst="rect">
+            <a:avLst/>
+          </a:prstGeom>
+          <a:noFill/>
+        </p:spPr>
+        <p:txBody>
+          <a:bodyPr wrap="square" rtlCol="0">
+            <a:spAutoFit/>
+          </a:bodyPr>
+          <a:lstStyle/>
+          <a:p>
+            <a:pPr>
+              <a:defRPr/>
+            </a:pPr>
+            <a:r>
+              <a:rPr lang="ru-RU" dirty="0">
+                <a:latin typeface="Times New Roman"/>
+                <a:cs typeface="Times New Roman"/>
+              </a:rPr>
+              <a:t>Рисунок </a:t>
+            </a:r>
+            <a:r>
+              <a:rPr lang="ru-RU" dirty="0" smtClean="0">
+                <a:latin typeface="Times New Roman"/>
+                <a:cs typeface="Times New Roman"/>
+              </a:rPr>
+              <a:t>14 </a:t>
+            </a:r>
+            <a:r>
+              <a:rPr lang="ru-RU" dirty="0">
+                <a:latin typeface="Times New Roman"/>
+                <a:cs typeface="Times New Roman"/>
+              </a:rPr>
+              <a:t>– </a:t>
+            </a:r>
+            <a:r>
+              <a:rPr lang="ru-RU" dirty="0" smtClean="0">
+                <a:latin typeface="Times New Roman"/>
+                <a:cs typeface="Times New Roman"/>
+              </a:rPr>
+              <a:t>Страница </a:t>
+            </a:r>
+            <a:r>
+              <a:rPr lang="ru-RU" dirty="0">
+                <a:latin typeface="Times New Roman"/>
+                <a:cs typeface="Times New Roman"/>
+              </a:rPr>
+              <a:t>конкретного события </a:t>
+            </a:r>
+          </a:p>
+        </p:txBody>
+      </p:sp>
       <p:pic>
         <p:nvPicPr>
-          <p:cNvPr id="7" name="Рисунок 6"/>
+          <p:cNvPr id="11" name="Рисунок 10"/>
           <p:cNvPicPr/>
           <p:nvPr/>
         </p:nvPicPr>
@@ -5099,98 +5222,49 @@
         </p:blipFill>
         <p:spPr>
           <a:xfrm>
-            <a:off x="416710" y="398209"/>
-            <a:ext cx="4917290" cy="3183191"/>
+            <a:off x="344137" y="504125"/>
+            <a:ext cx="4796790" cy="3074655"/>
           </a:xfrm>
           <a:prstGeom prst="rect">
             <a:avLst/>
           </a:prstGeom>
+          <a:ln>
+            <a:solidFill>
+              <a:schemeClr val="tx1"/>
+            </a:solidFill>
+          </a:ln>
         </p:spPr>
       </p:pic>
-      <p:sp>
-        <p:nvSpPr>
-          <p:cNvPr id="6" name="TextBox 11"/>
-          <p:cNvSpPr txBox="1"/>
+      <p:pic>
+        <p:nvPicPr>
+          <p:cNvPr id="12" name="Рисунок 11"/>
+          <p:cNvPicPr/>
           <p:nvPr/>
-        </p:nvSpPr>
-        <p:spPr bwMode="auto">
+        </p:nvPicPr>
+        <p:blipFill>
+          <a:blip r:embed="rId4"/>
+          <a:stretch>
+            <a:fillRect/>
+          </a:stretch>
+        </p:blipFill>
+        <p:spPr>
           <a:xfrm>
-            <a:off x="7762720" y="4724400"/>
-            <a:ext cx="3895880" cy="646331"/>
+            <a:off x="2743200" y="3867022"/>
+            <a:ext cx="4714933" cy="2914777"/>
           </a:xfrm>
           <a:prstGeom prst="rect">
             <a:avLst/>
           </a:prstGeom>
-          <a:noFill/>
-        </p:spPr>
-        <p:txBody>
-          <a:bodyPr wrap="square" rtlCol="0">
-            <a:spAutoFit/>
-          </a:bodyPr>
-          <a:lstStyle/>
-          <a:p>
-            <a:pPr>
-              <a:defRPr/>
-            </a:pPr>
-            <a:r>
-              <a:rPr lang="ru-RU" dirty="0">
-                <a:latin typeface="Times New Roman"/>
-                <a:cs typeface="Times New Roman"/>
-              </a:rPr>
-              <a:t>Рисунок </a:t>
-            </a:r>
-            <a:r>
-              <a:rPr lang="ru-RU" dirty="0" smtClean="0">
-                <a:latin typeface="Times New Roman"/>
-                <a:cs typeface="Times New Roman"/>
-              </a:rPr>
-              <a:t>15 </a:t>
-            </a:r>
-            <a:r>
-              <a:rPr lang="ru-RU" dirty="0">
-                <a:latin typeface="Times New Roman"/>
-                <a:cs typeface="Times New Roman"/>
-              </a:rPr>
-              <a:t>– С</a:t>
-            </a:r>
-            <a:r>
-              <a:rPr lang="ru-RU" dirty="0" smtClean="0">
-                <a:latin typeface="Times New Roman"/>
-                <a:cs typeface="Times New Roman"/>
-              </a:rPr>
-              <a:t>траница управления задачами</a:t>
-            </a:r>
-            <a:endParaRPr lang="ru-RU" dirty="0">
-              <a:latin typeface="Times New Roman"/>
-              <a:cs typeface="Times New Roman"/>
-            </a:endParaRPr>
-          </a:p>
-        </p:txBody>
-      </p:sp>
-      <p:pic>
-        <p:nvPicPr>
-          <p:cNvPr id="8" name="Рисунок 7"/>
-          <p:cNvPicPr/>
-          <p:nvPr/>
-        </p:nvPicPr>
-        <p:blipFill rotWithShape="1">
-          <a:blip r:embed="rId4"/>
-          <a:srcRect b="7581"/>
-          <a:stretch/>
-        </p:blipFill>
-        <p:spPr bwMode="auto">
-          <a:xfrm>
-            <a:off x="2743201" y="3886200"/>
-            <a:ext cx="5019520" cy="2971800"/>
-          </a:xfrm>
-          <a:prstGeom prst="rect">
-            <a:avLst/>
-          </a:prstGeom>
+          <a:ln>
+            <a:solidFill>
+              <a:schemeClr val="tx1"/>
+            </a:solidFill>
+          </a:ln>
         </p:spPr>
       </p:pic>
       <p:pic>
         <p:nvPicPr>
-          <p:cNvPr id="9" name="Рисунок 8"/>
+          <p:cNvPr id="13" name="Рисунок 12"/>
           <p:cNvPicPr/>
           <p:nvPr/>
         </p:nvPicPr>
@@ -5200,79 +5274,21 @@
             <a:fillRect/>
           </a:stretch>
         </p:blipFill>
-        <p:spPr bwMode="auto">
+        <p:spPr>
           <a:xfrm>
-            <a:off x="6248400" y="421289"/>
-            <a:ext cx="4606292" cy="3127775"/>
+            <a:off x="6477000" y="431219"/>
+            <a:ext cx="4495800" cy="3147561"/>
           </a:xfrm>
           <a:prstGeom prst="rect">
             <a:avLst/>
           </a:prstGeom>
+          <a:ln>
+            <a:solidFill>
+              <a:schemeClr val="tx1"/>
+            </a:solidFill>
+          </a:ln>
         </p:spPr>
       </p:pic>
-      <p:sp>
-        <p:nvSpPr>
-          <p:cNvPr id="10" name="TextBox 11"/>
-          <p:cNvSpPr txBox="1"/>
-          <p:nvPr/>
-        </p:nvSpPr>
-        <p:spPr bwMode="auto">
-          <a:xfrm>
-            <a:off x="6400800" y="3488532"/>
-            <a:ext cx="5534732" cy="369332"/>
-          </a:xfrm>
-          <a:prstGeom prst="rect">
-            <a:avLst/>
-          </a:prstGeom>
-          <a:noFill/>
-        </p:spPr>
-        <p:txBody>
-          <a:bodyPr wrap="square" rtlCol="0">
-            <a:spAutoFit/>
-          </a:bodyPr>
-          <a:lstStyle/>
-          <a:p>
-            <a:pPr>
-              <a:defRPr/>
-            </a:pPr>
-            <a:r>
-              <a:rPr lang="ru-RU" dirty="0">
-                <a:latin typeface="Times New Roman"/>
-                <a:cs typeface="Times New Roman"/>
-              </a:rPr>
-              <a:t>Рисунок </a:t>
-            </a:r>
-            <a:r>
-              <a:rPr lang="ru-RU" dirty="0" smtClean="0">
-                <a:latin typeface="Times New Roman"/>
-                <a:cs typeface="Times New Roman"/>
-              </a:rPr>
-              <a:t>14 </a:t>
-            </a:r>
-            <a:r>
-              <a:rPr lang="ru-RU" dirty="0">
-                <a:latin typeface="Times New Roman"/>
-                <a:cs typeface="Times New Roman"/>
-              </a:rPr>
-              <a:t>– </a:t>
-            </a:r>
-            <a:r>
-              <a:rPr lang="ru-RU" dirty="0" smtClean="0">
-                <a:latin typeface="Times New Roman"/>
-                <a:cs typeface="Times New Roman"/>
-              </a:rPr>
-              <a:t>Страница </a:t>
-            </a:r>
-            <a:r>
-              <a:rPr lang="ru-RU" dirty="0">
-                <a:latin typeface="Times New Roman"/>
-                <a:cs typeface="Times New Roman"/>
-              </a:rPr>
-              <a:t>конкретного события </a:t>
-            </a:r>
-          </a:p>
-        </p:txBody>
-      </p:sp>
     </p:spTree>
     <p:extLst>
       <p:ext uri="{BB962C8B-B14F-4D97-AF65-F5344CB8AC3E}">
